--- a/ietf126-Vienna/slides/chair-slides-bmwg-ippm2.pptx
+++ b/ietf126-Vienna/slides/chair-slides-bmwg-ippm2.pptx
@@ -312,14 +312,6 @@
 </p:presentation>
 </file>
 
-<file path=ppt/revisionInfo.xml><?xml version="1.0" encoding="utf-8"?>
-<p1510:revInfo xmlns:a="http://schemas.openxmlformats.org/drawingml/2006/main" xmlns:r="http://schemas.openxmlformats.org/officeDocument/2006/relationships" xmlns:p1510="http://schemas.microsoft.com/office/powerpoint/2015/10/main">
-  <p1510:revLst>
-    <p1510:client id="{95030CFF-6EB8-4A6F-AC26-1A45B7C3A0D4}" v="28" dt="2026-07-16T09:44:27.531"/>
-  </p1510:revLst>
-</p1510:revInfo>
-</file>
-
 <file path=ppt/changesInfos/changesInfo1.xml><?xml version="1.0" encoding="utf-8"?>
 <pc:chgInfo xmlns:a="http://schemas.openxmlformats.org/drawingml/2006/main" xmlns:r="http://schemas.openxmlformats.org/officeDocument/2006/relationships" xmlns:ac="http://schemas.microsoft.com/office/drawing/2013/main/command" xmlns:pc="http://schemas.microsoft.com/office/powerpoint/2013/main/command">
   <pc:docChgLst>
@@ -464,7 +456,7 @@
   <pc:docChgLst>
     <pc:chgData name="Graf Thomas, SCS-INI-NET-VNC-E2E" userId="487bc3e3-9ce7-4cdd-b7b4-8899ea88d289" providerId="ADAL" clId="{ADEEF08A-D719-4B50-A383-4105EDA2C206}"/>
     <pc:docChg chg="undo custSel addSld delSld modSld sldOrd">
-      <pc:chgData name="Graf Thomas, SCS-INI-NET-VNC-E2E" userId="487bc3e3-9ce7-4cdd-b7b4-8899ea88d289" providerId="ADAL" clId="{ADEEF08A-D719-4B50-A383-4105EDA2C206}" dt="2026-07-16T09:49:40.618" v="2160" actId="20577"/>
+      <pc:chgData name="Graf Thomas, SCS-INI-NET-VNC-E2E" userId="487bc3e3-9ce7-4cdd-b7b4-8899ea88d289" providerId="ADAL" clId="{ADEEF08A-D719-4B50-A383-4105EDA2C206}" dt="2026-07-22T04:54:20.006" v="2179" actId="1076"/>
       <pc:docMkLst>
         <pc:docMk/>
       </pc:docMkLst>
@@ -537,64 +529,48 @@
         </pc:spChg>
       </pc:sldChg>
       <pc:sldChg chg="addSp delSp modSp mod">
-        <pc:chgData name="Graf Thomas, SCS-INI-NET-VNC-E2E" userId="487bc3e3-9ce7-4cdd-b7b4-8899ea88d289" providerId="ADAL" clId="{ADEEF08A-D719-4B50-A383-4105EDA2C206}" dt="2026-07-16T09:48:17.577" v="2113" actId="14100"/>
+        <pc:chgData name="Graf Thomas, SCS-INI-NET-VNC-E2E" userId="487bc3e3-9ce7-4cdd-b7b4-8899ea88d289" providerId="ADAL" clId="{ADEEF08A-D719-4B50-A383-4105EDA2C206}" dt="2026-07-22T04:53:24.099" v="2165" actId="14100"/>
         <pc:sldMkLst>
           <pc:docMk/>
           <pc:sldMk cId="2332748115" sldId="263"/>
         </pc:sldMkLst>
-        <pc:picChg chg="del">
-          <ac:chgData name="Graf Thomas, SCS-INI-NET-VNC-E2E" userId="487bc3e3-9ce7-4cdd-b7b4-8899ea88d289" providerId="ADAL" clId="{ADEEF08A-D719-4B50-A383-4105EDA2C206}" dt="2026-07-16T09:15:40.378" v="1069" actId="478"/>
-          <ac:picMkLst>
-            <pc:docMk/>
-            <pc:sldMk cId="2332748115" sldId="263"/>
-            <ac:picMk id="5" creationId="{7D9875EA-960F-77FB-E964-5AC1532E0964}"/>
-          </ac:picMkLst>
-        </pc:picChg>
-        <pc:picChg chg="add mod">
-          <ac:chgData name="Graf Thomas, SCS-INI-NET-VNC-E2E" userId="487bc3e3-9ce7-4cdd-b7b4-8899ea88d289" providerId="ADAL" clId="{ADEEF08A-D719-4B50-A383-4105EDA2C206}" dt="2026-07-16T09:48:17.577" v="2113" actId="14100"/>
+        <pc:picChg chg="add del mod">
+          <ac:chgData name="Graf Thomas, SCS-INI-NET-VNC-E2E" userId="487bc3e3-9ce7-4cdd-b7b4-8899ea88d289" providerId="ADAL" clId="{ADEEF08A-D719-4B50-A383-4105EDA2C206}" dt="2026-07-22T04:53:17.355" v="2161" actId="478"/>
           <ac:picMkLst>
             <pc:docMk/>
             <pc:sldMk cId="2332748115" sldId="263"/>
             <ac:picMk id="5" creationId="{E6251B8B-2D34-1702-641D-FEC4208F9F76}"/>
           </ac:picMkLst>
         </pc:picChg>
-        <pc:picChg chg="add del mod">
-          <ac:chgData name="Graf Thomas, SCS-INI-NET-VNC-E2E" userId="487bc3e3-9ce7-4cdd-b7b4-8899ea88d289" providerId="ADAL" clId="{ADEEF08A-D719-4B50-A383-4105EDA2C206}" dt="2026-07-16T09:48:10.883" v="2109" actId="478"/>
+        <pc:picChg chg="add mod">
+          <ac:chgData name="Graf Thomas, SCS-INI-NET-VNC-E2E" userId="487bc3e3-9ce7-4cdd-b7b4-8899ea88d289" providerId="ADAL" clId="{ADEEF08A-D719-4B50-A383-4105EDA2C206}" dt="2026-07-22T04:53:24.099" v="2165" actId="14100"/>
           <ac:picMkLst>
             <pc:docMk/>
             <pc:sldMk cId="2332748115" sldId="263"/>
-            <ac:picMk id="6" creationId="{7B4B8BD9-E06D-0001-0C06-F7A8BE76638F}"/>
+            <ac:picMk id="6" creationId="{740079E7-C3F0-4F9D-6578-BA84D618A9AB}"/>
           </ac:picMkLst>
         </pc:picChg>
       </pc:sldChg>
       <pc:sldChg chg="addSp delSp modSp mod">
-        <pc:chgData name="Graf Thomas, SCS-INI-NET-VNC-E2E" userId="487bc3e3-9ce7-4cdd-b7b4-8899ea88d289" providerId="ADAL" clId="{ADEEF08A-D719-4B50-A383-4105EDA2C206}" dt="2026-07-16T09:48:39.286" v="2117" actId="1076"/>
+        <pc:chgData name="Graf Thomas, SCS-INI-NET-VNC-E2E" userId="487bc3e3-9ce7-4cdd-b7b4-8899ea88d289" providerId="ADAL" clId="{ADEEF08A-D719-4B50-A383-4105EDA2C206}" dt="2026-07-22T04:54:20.006" v="2179" actId="1076"/>
         <pc:sldMkLst>
           <pc:docMk/>
           <pc:sldMk cId="703495152" sldId="264"/>
         </pc:sldMkLst>
-        <pc:picChg chg="add del mod">
-          <ac:chgData name="Graf Thomas, SCS-INI-NET-VNC-E2E" userId="487bc3e3-9ce7-4cdd-b7b4-8899ea88d289" providerId="ADAL" clId="{ADEEF08A-D719-4B50-A383-4105EDA2C206}" dt="2026-07-16T09:48:35.109" v="2114" actId="478"/>
+        <pc:picChg chg="add mod">
+          <ac:chgData name="Graf Thomas, SCS-INI-NET-VNC-E2E" userId="487bc3e3-9ce7-4cdd-b7b4-8899ea88d289" providerId="ADAL" clId="{ADEEF08A-D719-4B50-A383-4105EDA2C206}" dt="2026-07-22T04:54:20.006" v="2179" actId="1076"/>
           <ac:picMkLst>
             <pc:docMk/>
             <pc:sldMk cId="703495152" sldId="264"/>
-            <ac:picMk id="5" creationId="{C8BC6838-A831-553D-9CC4-BCCCA60BD7FC}"/>
+            <ac:picMk id="5" creationId="{725CD5FF-8C56-2B3C-1091-98046959160E}"/>
           </ac:picMkLst>
         </pc:picChg>
-        <pc:picChg chg="add mod">
-          <ac:chgData name="Graf Thomas, SCS-INI-NET-VNC-E2E" userId="487bc3e3-9ce7-4cdd-b7b4-8899ea88d289" providerId="ADAL" clId="{ADEEF08A-D719-4B50-A383-4105EDA2C206}" dt="2026-07-16T09:48:39.286" v="2117" actId="1076"/>
+        <pc:picChg chg="add del mod">
+          <ac:chgData name="Graf Thomas, SCS-INI-NET-VNC-E2E" userId="487bc3e3-9ce7-4cdd-b7b4-8899ea88d289" providerId="ADAL" clId="{ADEEF08A-D719-4B50-A383-4105EDA2C206}" dt="2026-07-22T04:53:35.777" v="2166" actId="478"/>
           <ac:picMkLst>
             <pc:docMk/>
             <pc:sldMk cId="703495152" sldId="264"/>
             <ac:picMk id="6" creationId="{160FE680-BD91-2EC0-7F9B-F818C9B4074C}"/>
-          </ac:picMkLst>
-        </pc:picChg>
-        <pc:picChg chg="del">
-          <ac:chgData name="Graf Thomas, SCS-INI-NET-VNC-E2E" userId="487bc3e3-9ce7-4cdd-b7b4-8899ea88d289" providerId="ADAL" clId="{ADEEF08A-D719-4B50-A383-4105EDA2C206}" dt="2026-07-16T09:16:01.356" v="1074" actId="478"/>
-          <ac:picMkLst>
-            <pc:docMk/>
-            <pc:sldMk cId="703495152" sldId="264"/>
-            <ac:picMk id="6" creationId="{6C42BB47-46B8-24B3-E7FC-8D01301DFE79}"/>
           </ac:picMkLst>
         </pc:picChg>
       </pc:sldChg>
@@ -604,14 +580,6 @@
           <pc:docMk/>
           <pc:sldMk cId="1372742302" sldId="266"/>
         </pc:sldMkLst>
-        <pc:spChg chg="mod">
-          <ac:chgData name="Graf Thomas, SCS-INI-NET-VNC-E2E" userId="487bc3e3-9ce7-4cdd-b7b4-8899ea88d289" providerId="ADAL" clId="{ADEEF08A-D719-4B50-A383-4105EDA2C206}" dt="2026-07-16T09:18:48.162" v="1124" actId="20577"/>
-          <ac:spMkLst>
-            <pc:docMk/>
-            <pc:sldMk cId="1372742302" sldId="266"/>
-            <ac:spMk id="2" creationId="{0B9E15DC-F076-98D2-1BDF-BC01FEC9047B}"/>
-          </ac:spMkLst>
-        </pc:spChg>
       </pc:sldChg>
       <pc:sldChg chg="del">
         <pc:chgData name="Graf Thomas, SCS-INI-NET-VNC-E2E" userId="487bc3e3-9ce7-4cdd-b7b4-8899ea88d289" providerId="ADAL" clId="{ADEEF08A-D719-4B50-A383-4105EDA2C206}" dt="2026-07-16T09:47:24.918" v="2108" actId="47"/>
@@ -633,14 +601,6 @@
           <pc:docMk/>
           <pc:sldMk cId="2128497270" sldId="269"/>
         </pc:sldMkLst>
-        <pc:spChg chg="mod">
-          <ac:chgData name="Graf Thomas, SCS-INI-NET-VNC-E2E" userId="487bc3e3-9ce7-4cdd-b7b4-8899ea88d289" providerId="ADAL" clId="{ADEEF08A-D719-4B50-A383-4105EDA2C206}" dt="2026-07-16T09:19:02.597" v="1125" actId="20577"/>
-          <ac:spMkLst>
-            <pc:docMk/>
-            <pc:sldMk cId="2128497270" sldId="269"/>
-            <ac:spMk id="2" creationId="{0B9E15DC-F076-98D2-1BDF-BC01FEC9047B}"/>
-          </ac:spMkLst>
-        </pc:spChg>
       </pc:sldChg>
       <pc:sldChg chg="modSp del mod">
         <pc:chgData name="Graf Thomas, SCS-INI-NET-VNC-E2E" userId="487bc3e3-9ce7-4cdd-b7b4-8899ea88d289" providerId="ADAL" clId="{ADEEF08A-D719-4B50-A383-4105EDA2C206}" dt="2026-07-16T09:17:11.420" v="1113" actId="2696"/>
@@ -648,14 +608,6 @@
           <pc:docMk/>
           <pc:sldMk cId="2434865477" sldId="270"/>
         </pc:sldMkLst>
-        <pc:spChg chg="mod">
-          <ac:chgData name="Graf Thomas, SCS-INI-NET-VNC-E2E" userId="487bc3e3-9ce7-4cdd-b7b4-8899ea88d289" providerId="ADAL" clId="{ADEEF08A-D719-4B50-A383-4105EDA2C206}" dt="2026-07-16T09:13:51.444" v="1067" actId="20577"/>
-          <ac:spMkLst>
-            <pc:docMk/>
-            <pc:sldMk cId="2434865477" sldId="270"/>
-            <ac:spMk id="3" creationId="{DA4A6F5D-9442-B583-BAB9-5A102B90EC22}"/>
-          </ac:spMkLst>
-        </pc:spChg>
       </pc:sldChg>
       <pc:sldChg chg="addSp delSp modSp del mod">
         <pc:chgData name="Graf Thomas, SCS-INI-NET-VNC-E2E" userId="487bc3e3-9ce7-4cdd-b7b4-8899ea88d289" providerId="ADAL" clId="{ADEEF08A-D719-4B50-A383-4105EDA2C206}" dt="2026-07-16T09:47:18.698" v="2107" actId="47"/>
@@ -663,46 +615,6 @@
           <pc:docMk/>
           <pc:sldMk cId="1859012803" sldId="271"/>
         </pc:sldMkLst>
-        <pc:spChg chg="mod">
-          <ac:chgData name="Graf Thomas, SCS-INI-NET-VNC-E2E" userId="487bc3e3-9ce7-4cdd-b7b4-8899ea88d289" providerId="ADAL" clId="{ADEEF08A-D719-4B50-A383-4105EDA2C206}" dt="2026-07-16T09:16:30.343" v="1108" actId="20577"/>
-          <ac:spMkLst>
-            <pc:docMk/>
-            <pc:sldMk cId="1859012803" sldId="271"/>
-            <ac:spMk id="2" creationId="{0B9E15DC-F076-98D2-1BDF-BC01FEC9047B}"/>
-          </ac:spMkLst>
-        </pc:spChg>
-        <pc:spChg chg="del mod">
-          <ac:chgData name="Graf Thomas, SCS-INI-NET-VNC-E2E" userId="487bc3e3-9ce7-4cdd-b7b4-8899ea88d289" providerId="ADAL" clId="{ADEEF08A-D719-4B50-A383-4105EDA2C206}" dt="2026-07-16T09:17:49.129" v="1120" actId="478"/>
-          <ac:spMkLst>
-            <pc:docMk/>
-            <pc:sldMk cId="1859012803" sldId="271"/>
-            <ac:spMk id="3" creationId="{24D281E7-F8E0-9C4E-FACE-B48E30DA03D5}"/>
-          </ac:spMkLst>
-        </pc:spChg>
-        <pc:spChg chg="add mod">
-          <ac:chgData name="Graf Thomas, SCS-INI-NET-VNC-E2E" userId="487bc3e3-9ce7-4cdd-b7b4-8899ea88d289" providerId="ADAL" clId="{ADEEF08A-D719-4B50-A383-4105EDA2C206}" dt="2026-07-16T09:18:06.653" v="1123" actId="1076"/>
-          <ac:spMkLst>
-            <pc:docMk/>
-            <pc:sldMk cId="1859012803" sldId="271"/>
-            <ac:spMk id="9" creationId="{7D37B510-93C9-AA3C-B299-9519676CBF6E}"/>
-          </ac:spMkLst>
-        </pc:spChg>
-        <pc:picChg chg="del">
-          <ac:chgData name="Graf Thomas, SCS-INI-NET-VNC-E2E" userId="487bc3e3-9ce7-4cdd-b7b4-8899ea88d289" providerId="ADAL" clId="{ADEEF08A-D719-4B50-A383-4105EDA2C206}" dt="2026-07-16T09:16:44.152" v="1109" actId="478"/>
-          <ac:picMkLst>
-            <pc:docMk/>
-            <pc:sldMk cId="1859012803" sldId="271"/>
-            <ac:picMk id="6" creationId="{85C6D280-0516-F8D3-85BF-7CA106FAF3CA}"/>
-          </ac:picMkLst>
-        </pc:picChg>
-        <pc:picChg chg="add mod">
-          <ac:chgData name="Graf Thomas, SCS-INI-NET-VNC-E2E" userId="487bc3e3-9ce7-4cdd-b7b4-8899ea88d289" providerId="ADAL" clId="{ADEEF08A-D719-4B50-A383-4105EDA2C206}" dt="2026-07-16T09:16:49.815" v="1112" actId="1076"/>
-          <ac:picMkLst>
-            <pc:docMk/>
-            <pc:sldMk cId="1859012803" sldId="271"/>
-            <ac:picMk id="7" creationId="{2A4CF8FD-B7B0-9349-9F58-15E1143956C9}"/>
-          </ac:picMkLst>
-        </pc:picChg>
       </pc:sldChg>
       <pc:sldChg chg="del">
         <pc:chgData name="Graf Thomas, SCS-INI-NET-VNC-E2E" userId="487bc3e3-9ce7-4cdd-b7b4-8899ea88d289" providerId="ADAL" clId="{ADEEF08A-D719-4B50-A383-4105EDA2C206}" dt="2026-07-16T09:19:27.094" v="1127" actId="47"/>
@@ -712,7 +624,7 @@
         </pc:sldMkLst>
       </pc:sldChg>
       <pc:sldChg chg="addSp delSp modSp add mod">
-        <pc:chgData name="Graf Thomas, SCS-INI-NET-VNC-E2E" userId="487bc3e3-9ce7-4cdd-b7b4-8899ea88d289" providerId="ADAL" clId="{ADEEF08A-D719-4B50-A383-4105EDA2C206}" dt="2026-07-16T09:49:22.469" v="2158" actId="255"/>
+        <pc:chgData name="Graf Thomas, SCS-INI-NET-VNC-E2E" userId="487bc3e3-9ce7-4cdd-b7b4-8899ea88d289" providerId="ADAL" clId="{ADEEF08A-D719-4B50-A383-4105EDA2C206}" dt="2026-07-22T04:54:14.337" v="2178" actId="1076"/>
         <pc:sldMkLst>
           <pc:docMk/>
           <pc:sldMk cId="1774228576" sldId="273"/>
@@ -725,20 +637,20 @@
             <ac:spMk id="2" creationId="{867BF7E4-BAF8-FC7F-2755-364CB1463A25}"/>
           </ac:spMkLst>
         </pc:spChg>
-        <pc:picChg chg="add mod">
-          <ac:chgData name="Graf Thomas, SCS-INI-NET-VNC-E2E" userId="487bc3e3-9ce7-4cdd-b7b4-8899ea88d289" providerId="ADAL" clId="{ADEEF08A-D719-4B50-A383-4105EDA2C206}" dt="2026-07-16T09:49:02.992" v="2123" actId="1076"/>
+        <pc:picChg chg="add del mod">
+          <ac:chgData name="Graf Thomas, SCS-INI-NET-VNC-E2E" userId="487bc3e3-9ce7-4cdd-b7b4-8899ea88d289" providerId="ADAL" clId="{ADEEF08A-D719-4B50-A383-4105EDA2C206}" dt="2026-07-22T04:53:54.940" v="2171" actId="478"/>
           <ac:picMkLst>
             <pc:docMk/>
             <pc:sldMk cId="1774228576" sldId="273"/>
             <ac:picMk id="5" creationId="{24EAC992-1A21-CCDA-317A-F5A7ADE32B9E}"/>
           </ac:picMkLst>
         </pc:picChg>
-        <pc:picChg chg="del">
-          <ac:chgData name="Graf Thomas, SCS-INI-NET-VNC-E2E" userId="487bc3e3-9ce7-4cdd-b7b4-8899ea88d289" providerId="ADAL" clId="{ADEEF08A-D719-4B50-A383-4105EDA2C206}" dt="2026-07-16T09:48:55.286" v="2119" actId="478"/>
+        <pc:picChg chg="add mod">
+          <ac:chgData name="Graf Thomas, SCS-INI-NET-VNC-E2E" userId="487bc3e3-9ce7-4cdd-b7b4-8899ea88d289" providerId="ADAL" clId="{ADEEF08A-D719-4B50-A383-4105EDA2C206}" dt="2026-07-22T04:54:14.337" v="2178" actId="1076"/>
           <ac:picMkLst>
             <pc:docMk/>
             <pc:sldMk cId="1774228576" sldId="273"/>
-            <ac:picMk id="6" creationId="{AE307775-F9CD-2F4A-3B9C-F62AEBE0853F}"/>
+            <ac:picMk id="6" creationId="{F6DDF55E-9C88-D634-8753-5A157C27A2C4}"/>
           </ac:picMkLst>
         </pc:picChg>
       </pc:sldChg>
@@ -748,38 +660,6 @@
           <pc:docMk/>
           <pc:sldMk cId="3043113463" sldId="273"/>
         </pc:sldMkLst>
-        <pc:spChg chg="mod">
-          <ac:chgData name="Graf Thomas, SCS-INI-NET-VNC-E2E" userId="487bc3e3-9ce7-4cdd-b7b4-8899ea88d289" providerId="ADAL" clId="{ADEEF08A-D719-4B50-A383-4105EDA2C206}" dt="2026-07-16T09:22:39.135" v="1145" actId="20577"/>
-          <ac:spMkLst>
-            <pc:docMk/>
-            <pc:sldMk cId="3043113463" sldId="273"/>
-            <ac:spMk id="2" creationId="{2793D84D-BA3F-4BC3-05B1-F1C6985A58BA}"/>
-          </ac:spMkLst>
-        </pc:spChg>
-        <pc:spChg chg="mod">
-          <ac:chgData name="Graf Thomas, SCS-INI-NET-VNC-E2E" userId="487bc3e3-9ce7-4cdd-b7b4-8899ea88d289" providerId="ADAL" clId="{ADEEF08A-D719-4B50-A383-4105EDA2C206}" dt="2026-07-16T09:46:35.853" v="2105" actId="1076"/>
-          <ac:spMkLst>
-            <pc:docMk/>
-            <pc:sldMk cId="3043113463" sldId="273"/>
-            <ac:spMk id="3" creationId="{4C3CFCCD-25C3-F0B8-5E3F-E0F483354B56}"/>
-          </ac:spMkLst>
-        </pc:spChg>
-        <pc:spChg chg="add mod">
-          <ac:chgData name="Graf Thomas, SCS-INI-NET-VNC-E2E" userId="487bc3e3-9ce7-4cdd-b7b4-8899ea88d289" providerId="ADAL" clId="{ADEEF08A-D719-4B50-A383-4105EDA2C206}" dt="2026-07-16T09:45:26.124" v="2085" actId="1076"/>
-          <ac:spMkLst>
-            <pc:docMk/>
-            <pc:sldMk cId="3043113463" sldId="273"/>
-            <ac:spMk id="8" creationId="{828DC0BA-F80F-FD0F-448C-2F7FEF399C05}"/>
-          </ac:spMkLst>
-        </pc:spChg>
-        <pc:picChg chg="add mod">
-          <ac:chgData name="Graf Thomas, SCS-INI-NET-VNC-E2E" userId="487bc3e3-9ce7-4cdd-b7b4-8899ea88d289" providerId="ADAL" clId="{ADEEF08A-D719-4B50-A383-4105EDA2C206}" dt="2026-07-16T09:45:26.124" v="2085" actId="1076"/>
-          <ac:picMkLst>
-            <pc:docMk/>
-            <pc:sldMk cId="3043113463" sldId="273"/>
-            <ac:picMk id="6" creationId="{BA2358F9-E859-21E8-71CB-113CB451D16A}"/>
-          </ac:picMkLst>
-        </pc:picChg>
       </pc:sldChg>
       <pc:sldChg chg="add del">
         <pc:chgData name="Graf Thomas, SCS-INI-NET-VNC-E2E" userId="487bc3e3-9ce7-4cdd-b7b4-8899ea88d289" providerId="ADAL" clId="{ADEEF08A-D719-4B50-A383-4105EDA2C206}" dt="2026-03-16T02:22:09.813" v="337" actId="47"/>
@@ -30104,7 +29984,7 @@
         <p:fade/>
       </p:transition>
     </mc:Choice>
-    <mc:Fallback xmlns:ahyp="http://schemas.microsoft.com/office/drawing/2018/hyperlinkcolor" xmlns:p15="http://schemas.microsoft.com/office/powerpoint/2012/main" xmlns:com="http://schemas.openxmlformats.org/drawingml/2006/compatibility" xmlns:pvml="urn:schemas-microsoft-com:office:powerpoint" xmlns:v="urn:schemas-microsoft-com:vml" xmlns:o="urn:schemas-microsoft-com:office:office" xmlns:dgm="http://schemas.openxmlformats.org/drawingml/2006/diagram" xmlns:c="http://schemas.openxmlformats.org/drawingml/2006/chart" xmlns:mv="urn:schemas-microsoft-com:mac:vml" xmlns="">
+    <mc:Fallback xmlns="" xmlns:mv="urn:schemas-microsoft-com:mac:vml" xmlns:c="http://schemas.openxmlformats.org/drawingml/2006/chart" xmlns:dgm="http://schemas.openxmlformats.org/drawingml/2006/diagram" xmlns:o="urn:schemas-microsoft-com:office:office" xmlns:v="urn:schemas-microsoft-com:vml" xmlns:pvml="urn:schemas-microsoft-com:office:powerpoint" xmlns:com="http://schemas.openxmlformats.org/drawingml/2006/compatibility" xmlns:p15="http://schemas.microsoft.com/office/powerpoint/2012/main" xmlns:ahyp="http://schemas.microsoft.com/office/drawing/2018/hyperlinkcolor">
       <p:transition spd="slow">
         <p:fade/>
       </p:transition>
@@ -30427,7 +30307,7 @@
         <p:fade/>
       </p:transition>
     </mc:Choice>
-    <mc:Fallback xmlns:ahyp="http://schemas.microsoft.com/office/drawing/2018/hyperlinkcolor" xmlns:p15="http://schemas.microsoft.com/office/powerpoint/2012/main" xmlns:com="http://schemas.openxmlformats.org/drawingml/2006/compatibility" xmlns:pvml="urn:schemas-microsoft-com:office:powerpoint" xmlns:v="urn:schemas-microsoft-com:vml" xmlns:o="urn:schemas-microsoft-com:office:office" xmlns:dgm="http://schemas.openxmlformats.org/drawingml/2006/diagram" xmlns:c="http://schemas.openxmlformats.org/drawingml/2006/chart" xmlns:mv="urn:schemas-microsoft-com:mac:vml" xmlns="">
+    <mc:Fallback xmlns="" xmlns:mv="urn:schemas-microsoft-com:mac:vml" xmlns:c="http://schemas.openxmlformats.org/drawingml/2006/chart" xmlns:dgm="http://schemas.openxmlformats.org/drawingml/2006/diagram" xmlns:o="urn:schemas-microsoft-com:office:office" xmlns:v="urn:schemas-microsoft-com:vml" xmlns:pvml="urn:schemas-microsoft-com:office:powerpoint" xmlns:com="http://schemas.openxmlformats.org/drawingml/2006/compatibility" xmlns:p15="http://schemas.microsoft.com/office/powerpoint/2012/main" xmlns:ahyp="http://schemas.microsoft.com/office/drawing/2018/hyperlinkcolor">
       <p:transition spd="slow">
         <p:fade/>
       </p:transition>
@@ -31194,10 +31074,10 @@
       </p:sp>
       <p:pic>
         <p:nvPicPr>
-          <p:cNvPr id="5" name="Picture 4">
+          <p:cNvPr id="6" name="Picture 5">
             <a:extLst>
               <a:ext uri="{FF2B5EF4-FFF2-40B4-BE49-F238E27FC236}">
-                <a16:creationId xmlns:a16="http://schemas.microsoft.com/office/drawing/2014/main" id="{E6251B8B-2D34-1702-641D-FEC4208F9F76}"/>
+                <a16:creationId xmlns:a16="http://schemas.microsoft.com/office/drawing/2014/main" id="{740079E7-C3F0-4F9D-6578-BA84D618A9AB}"/>
               </a:ext>
             </a:extLst>
           </p:cNvPr>
@@ -31214,8 +31094,8 @@
         </p:blipFill>
         <p:spPr>
           <a:xfrm>
-            <a:off x="534473" y="1909301"/>
-            <a:ext cx="5326213" cy="3015976"/>
+            <a:off x="471899" y="1899081"/>
+            <a:ext cx="4804537" cy="3026195"/>
           </a:xfrm>
           <a:prstGeom prst="rect">
             <a:avLst/>
@@ -31325,10 +31205,10 @@
       </p:sp>
       <p:pic>
         <p:nvPicPr>
-          <p:cNvPr id="6" name="Picture 5">
+          <p:cNvPr id="5" name="Picture 4">
             <a:extLst>
               <a:ext uri="{FF2B5EF4-FFF2-40B4-BE49-F238E27FC236}">
-                <a16:creationId xmlns:a16="http://schemas.microsoft.com/office/drawing/2014/main" id="{160FE680-BD91-2EC0-7F9B-F818C9B4074C}"/>
+                <a16:creationId xmlns:a16="http://schemas.microsoft.com/office/drawing/2014/main" id="{725CD5FF-8C56-2B3C-1091-98046959160E}"/>
               </a:ext>
             </a:extLst>
           </p:cNvPr>
@@ -31345,8 +31225,8 @@
         </p:blipFill>
         <p:spPr>
           <a:xfrm>
-            <a:off x="540913" y="1934465"/>
-            <a:ext cx="5934464" cy="2790333"/>
+            <a:off x="471900" y="1871283"/>
+            <a:ext cx="5851627" cy="3021140"/>
           </a:xfrm>
           <a:prstGeom prst="rect">
             <a:avLst/>
@@ -31466,10 +31346,10 @@
       </p:sp>
       <p:pic>
         <p:nvPicPr>
-          <p:cNvPr id="5" name="Picture 4">
+          <p:cNvPr id="6" name="Picture 5">
             <a:extLst>
               <a:ext uri="{FF2B5EF4-FFF2-40B4-BE49-F238E27FC236}">
-                <a16:creationId xmlns:a16="http://schemas.microsoft.com/office/drawing/2014/main" id="{24EAC992-1A21-CCDA-317A-F5A7ADE32B9E}"/>
+                <a16:creationId xmlns:a16="http://schemas.microsoft.com/office/drawing/2014/main" id="{F6DDF55E-9C88-D634-8753-5A157C27A2C4}"/>
               </a:ext>
             </a:extLst>
           </p:cNvPr>
@@ -31486,8 +31366,8 @@
         </p:blipFill>
         <p:spPr>
           <a:xfrm>
-            <a:off x="471900" y="2059863"/>
-            <a:ext cx="6815788" cy="2111497"/>
+            <a:off x="471900" y="2199761"/>
+            <a:ext cx="5838748" cy="2394253"/>
           </a:xfrm>
           <a:prstGeom prst="rect">
             <a:avLst/>
@@ -32993,12 +32873,11 @@
 </file>
 
 <file path=customXml/item1.xml><?xml version="1.0" encoding="utf-8"?>
-<?mso-contentType ?>
-<FormTemplates xmlns="http://schemas.microsoft.com/sharepoint/v3/contenttype/forms">
-  <Display>DocumentLibraryForm</Display>
-  <Edit>DocumentLibraryForm</Edit>
-  <New>DocumentLibraryForm</New>
-</FormTemplates>
+<p:properties xmlns:p="http://schemas.microsoft.com/office/2006/metadata/properties" xmlns:xsi="http://www.w3.org/2001/XMLSchema-instance" xmlns:pc="http://schemas.microsoft.com/office/infopath/2007/PartnerControls">
+  <documentManagement>
+    <_activity xmlns="3e5e162a-5953-4fde-83b3-9639e6ab13bb" xsi:nil="true"/>
+  </documentManagement>
+</p:properties>
 </file>
 
 <file path=customXml/item2.xml><?xml version="1.0" encoding="utf-8"?>
@@ -33255,17 +33134,27 @@
 </file>
 
 <file path=customXml/item3.xml><?xml version="1.0" encoding="utf-8"?>
-<p:properties xmlns:p="http://schemas.microsoft.com/office/2006/metadata/properties" xmlns:xsi="http://www.w3.org/2001/XMLSchema-instance" xmlns:pc="http://schemas.microsoft.com/office/infopath/2007/PartnerControls">
-  <documentManagement>
-    <_activity xmlns="3e5e162a-5953-4fde-83b3-9639e6ab13bb" xsi:nil="true"/>
-  </documentManagement>
-</p:properties>
+<?mso-contentType ?>
+<FormTemplates xmlns="http://schemas.microsoft.com/sharepoint/v3/contenttype/forms">
+  <Display>DocumentLibraryForm</Display>
+  <Edit>DocumentLibraryForm</Edit>
+  <New>DocumentLibraryForm</New>
+</FormTemplates>
 </file>
 
 <file path=customXml/itemProps1.xml><?xml version="1.0" encoding="utf-8"?>
-<ds:datastoreItem xmlns:ds="http://schemas.openxmlformats.org/officeDocument/2006/customXml" ds:itemID="{9104BBC9-6B71-4DC1-A0E0-1E198363AC7F}">
+<ds:datastoreItem xmlns:ds="http://schemas.openxmlformats.org/officeDocument/2006/customXml" ds:itemID="{3D7021EF-4D3D-4708-92FB-F2CD02CEF7A1}">
   <ds:schemaRefs>
-    <ds:schemaRef ds:uri="http://schemas.microsoft.com/sharepoint/v3/contenttype/forms"/>
+    <ds:schemaRef ds:uri="http://purl.org/dc/elements/1.1/"/>
+    <ds:schemaRef ds:uri="3e5e162a-5953-4fde-83b3-9639e6ab13bb"/>
+    <ds:schemaRef ds:uri="266fa233-377d-43d6-82a1-e70154e55ff7"/>
+    <ds:schemaRef ds:uri="http://purl.org/dc/terms/"/>
+    <ds:schemaRef ds:uri="http://purl.org/dc/dcmitype/"/>
+    <ds:schemaRef ds:uri="http://schemas.microsoft.com/office/infopath/2007/PartnerControls"/>
+    <ds:schemaRef ds:uri="http://schemas.microsoft.com/office/2006/documentManagement/types"/>
+    <ds:schemaRef ds:uri="http://schemas.openxmlformats.org/package/2006/metadata/core-properties"/>
+    <ds:schemaRef ds:uri="http://schemas.microsoft.com/office/2006/metadata/properties"/>
+    <ds:schemaRef ds:uri="http://www.w3.org/XML/1998/namespace"/>
   </ds:schemaRefs>
 </ds:datastoreItem>
 </file>
@@ -33290,18 +33179,9 @@
 </file>
 
 <file path=customXml/itemProps3.xml><?xml version="1.0" encoding="utf-8"?>
-<ds:datastoreItem xmlns:ds="http://schemas.openxmlformats.org/officeDocument/2006/customXml" ds:itemID="{3D7021EF-4D3D-4708-92FB-F2CD02CEF7A1}">
+<ds:datastoreItem xmlns:ds="http://schemas.openxmlformats.org/officeDocument/2006/customXml" ds:itemID="{9104BBC9-6B71-4DC1-A0E0-1E198363AC7F}">
   <ds:schemaRefs>
-    <ds:schemaRef ds:uri="http://purl.org/dc/elements/1.1/"/>
-    <ds:schemaRef ds:uri="3e5e162a-5953-4fde-83b3-9639e6ab13bb"/>
-    <ds:schemaRef ds:uri="266fa233-377d-43d6-82a1-e70154e55ff7"/>
-    <ds:schemaRef ds:uri="http://purl.org/dc/terms/"/>
-    <ds:schemaRef ds:uri="http://purl.org/dc/dcmitype/"/>
-    <ds:schemaRef ds:uri="http://schemas.microsoft.com/office/infopath/2007/PartnerControls"/>
-    <ds:schemaRef ds:uri="http://schemas.microsoft.com/office/2006/documentManagement/types"/>
-    <ds:schemaRef ds:uri="http://schemas.openxmlformats.org/package/2006/metadata/core-properties"/>
-    <ds:schemaRef ds:uri="http://schemas.microsoft.com/office/2006/metadata/properties"/>
-    <ds:schemaRef ds:uri="http://www.w3.org/XML/1998/namespace"/>
+    <ds:schemaRef ds:uri="http://schemas.microsoft.com/sharepoint/v3/contenttype/forms"/>
   </ds:schemaRefs>
 </ds:datastoreItem>
 </file>
